--- a/cpp_briefintro_update2.pptx
+++ b/cpp_briefintro_update2.pptx
@@ -341,7 +341,7 @@
             <a:fld id="{F12C35BD-B3D3-4E16-BCD2-CA15E18C65B7}" type="datetimeFigureOut">
               <a:rPr lang="ko-KR" altLang="en-US" smtClean="0"/>
               <a:pPr/>
-              <a:t>2026. 9. 10.</a:t>
+              <a:t>2026. 9. 11.</a:t>
             </a:fld>
             <a:endParaRPr lang="ko-KR" altLang="en-US"/>
           </a:p>
@@ -506,7 +506,7 @@
             <a:fld id="{F12C35BD-B3D3-4E16-BCD2-CA15E18C65B7}" type="datetimeFigureOut">
               <a:rPr lang="ko-KR" altLang="en-US" smtClean="0"/>
               <a:pPr/>
-              <a:t>2026. 9. 10.</a:t>
+              <a:t>2026. 9. 11.</a:t>
             </a:fld>
             <a:endParaRPr lang="ko-KR" altLang="en-US"/>
           </a:p>
@@ -681,7 +681,7 @@
             <a:fld id="{F12C35BD-B3D3-4E16-BCD2-CA15E18C65B7}" type="datetimeFigureOut">
               <a:rPr lang="ko-KR" altLang="en-US" smtClean="0"/>
               <a:pPr/>
-              <a:t>2026. 9. 10.</a:t>
+              <a:t>2026. 9. 11.</a:t>
             </a:fld>
             <a:endParaRPr lang="ko-KR" altLang="en-US"/>
           </a:p>
@@ -846,7 +846,7 @@
             <a:fld id="{F12C35BD-B3D3-4E16-BCD2-CA15E18C65B7}" type="datetimeFigureOut">
               <a:rPr lang="ko-KR" altLang="en-US" smtClean="0"/>
               <a:pPr/>
-              <a:t>2026. 9. 10.</a:t>
+              <a:t>2026. 9. 11.</a:t>
             </a:fld>
             <a:endParaRPr lang="ko-KR" altLang="en-US"/>
           </a:p>
@@ -1088,7 +1088,7 @@
             <a:fld id="{F12C35BD-B3D3-4E16-BCD2-CA15E18C65B7}" type="datetimeFigureOut">
               <a:rPr lang="ko-KR" altLang="en-US" smtClean="0"/>
               <a:pPr/>
-              <a:t>2026. 9. 10.</a:t>
+              <a:t>2026. 9. 11.</a:t>
             </a:fld>
             <a:endParaRPr lang="ko-KR" altLang="en-US"/>
           </a:p>
@@ -1370,7 +1370,7 @@
             <a:fld id="{F12C35BD-B3D3-4E16-BCD2-CA15E18C65B7}" type="datetimeFigureOut">
               <a:rPr lang="ko-KR" altLang="en-US" smtClean="0"/>
               <a:pPr/>
-              <a:t>2026. 9. 10.</a:t>
+              <a:t>2026. 9. 11.</a:t>
             </a:fld>
             <a:endParaRPr lang="ko-KR" altLang="en-US"/>
           </a:p>
@@ -1786,7 +1786,7 @@
             <a:fld id="{F12C35BD-B3D3-4E16-BCD2-CA15E18C65B7}" type="datetimeFigureOut">
               <a:rPr lang="ko-KR" altLang="en-US" smtClean="0"/>
               <a:pPr/>
-              <a:t>2026. 9. 10.</a:t>
+              <a:t>2026. 9. 11.</a:t>
             </a:fld>
             <a:endParaRPr lang="ko-KR" altLang="en-US"/>
           </a:p>
@@ -1900,7 +1900,7 @@
             <a:fld id="{F12C35BD-B3D3-4E16-BCD2-CA15E18C65B7}" type="datetimeFigureOut">
               <a:rPr lang="ko-KR" altLang="en-US" smtClean="0"/>
               <a:pPr/>
-              <a:t>2026. 9. 10.</a:t>
+              <a:t>2026. 9. 11.</a:t>
             </a:fld>
             <a:endParaRPr lang="ko-KR" altLang="en-US"/>
           </a:p>
@@ -1992,7 +1992,7 @@
             <a:fld id="{F12C35BD-B3D3-4E16-BCD2-CA15E18C65B7}" type="datetimeFigureOut">
               <a:rPr lang="ko-KR" altLang="en-US" smtClean="0"/>
               <a:pPr/>
-              <a:t>2026. 9. 10.</a:t>
+              <a:t>2026. 9. 11.</a:t>
             </a:fld>
             <a:endParaRPr lang="ko-KR" altLang="en-US"/>
           </a:p>
@@ -2264,7 +2264,7 @@
             <a:fld id="{F12C35BD-B3D3-4E16-BCD2-CA15E18C65B7}" type="datetimeFigureOut">
               <a:rPr lang="ko-KR" altLang="en-US" smtClean="0"/>
               <a:pPr/>
-              <a:t>2026. 9. 10.</a:t>
+              <a:t>2026. 9. 11.</a:t>
             </a:fld>
             <a:endParaRPr lang="ko-KR" altLang="en-US"/>
           </a:p>
@@ -2513,7 +2513,7 @@
             <a:fld id="{F12C35BD-B3D3-4E16-BCD2-CA15E18C65B7}" type="datetimeFigureOut">
               <a:rPr lang="ko-KR" altLang="en-US" smtClean="0"/>
               <a:pPr/>
-              <a:t>2026. 9. 10.</a:t>
+              <a:t>2026. 9. 11.</a:t>
             </a:fld>
             <a:endParaRPr lang="ko-KR" altLang="en-US"/>
           </a:p>
@@ -2721,7 +2721,7 @@
             <a:fld id="{F12C35BD-B3D3-4E16-BCD2-CA15E18C65B7}" type="datetimeFigureOut">
               <a:rPr lang="ko-KR" altLang="en-US" smtClean="0"/>
               <a:pPr/>
-              <a:t>2026. 9. 10.</a:t>
+              <a:t>2026. 9. 11.</a:t>
             </a:fld>
             <a:endParaRPr lang="ko-KR" altLang="en-US"/>
           </a:p>
@@ -3706,20 +3706,10 @@
               </a:rPr>
               <a:t>printf</a:t>
             </a:r>
-            <a:r>
-              <a:rPr kumimoji="1" lang="en-US" altLang="ko-KR" b="1" dirty="0">
-                <a:latin typeface="Courier New" panose="02070309020205020404" pitchFamily="49" charset="0"/>
-                <a:cs typeface="Courier New" panose="02070309020205020404" pitchFamily="49" charset="0"/>
-              </a:rPr>
-              <a:t> </a:t>
-            </a:r>
-            <a:r>
-              <a:rPr kumimoji="1" lang="en-US" altLang="ko-KR" dirty="0">
-                <a:latin typeface="+mj-lt"/>
-                <a:cs typeface="Courier New" panose="02070309020205020404" pitchFamily="49" charset="0"/>
-              </a:rPr>
-              <a:t>in C</a:t>
-            </a:r>
+            <a:endParaRPr kumimoji="1" lang="en-US" altLang="ko-KR" dirty="0">
+              <a:latin typeface="+mj-lt"/>
+              <a:cs typeface="Courier New" panose="02070309020205020404" pitchFamily="49" charset="0"/>
+            </a:endParaRPr>
           </a:p>
           <a:p>
             <a:r>
